--- a/Documentacion/06 - Presentacion Final con Demo.pptx
+++ b/Documentacion/06 - Presentacion Final con Demo.pptx
@@ -4,9 +4,6 @@
   <p:sldMasterIdLst>
     <p:sldMasterId id="2147483648" r:id="rId1"/>
   </p:sldMasterIdLst>
-  <p:notesMasterIdLst>
-    <p:notesMasterId r:id="rId11"/>
-  </p:notesMasterIdLst>
   <p:sldIdLst>
     <p:sldId id="256" r:id="rId2"/>
     <p:sldId id="257" r:id="rId3"/>
@@ -18,7 +15,10 @@
     <p:sldId id="263" r:id="rId9"/>
     <p:sldId id="264" r:id="rId10"/>
   </p:sldIdLst>
-  <p:sldSz cx="9144000" cy="5143500" type="screen16x9"/>
+  <p:notesMasterIdLst>
+    <p:notesMasterId r:id="rId11"/>
+  </p:notesMasterIdLst>
+  <p:sldSz cx="9144000" cy="5143500"/>
   <p:notesSz cx="5143500" cy="9144000"/>
   <p:defaultTextStyle>
     <a:lvl1pPr marL="0" algn="l" defTabSz="914400" rtl="0" eaLnBrk="1" latinLnBrk="0" hangingPunct="1">
@@ -112,11 +112,6 @@
       </a:defRPr>
     </a:lvl9pPr>
   </p:defaultTextStyle>
-  <p:extLst>
-    <p:ext uri="{EFAFB233-063F-42B5-8137-9DF3F51BA10A}">
-      <p15:sldGuideLst xmlns:p15="http://schemas.microsoft.com/office/powerpoint/2012/main"/>
-    </p:ext>
-  </p:extLst>
 </p:presentation>
 </file>
 
@@ -142,10 +137,234 @@
           <a:chExt cx="0" cy="0"/>
         </a:xfrm>
       </p:grpSpPr>
+      <p:sp>
+        <p:nvSpPr>
+          <p:cNvPr id="2" name="Header Placeholder 1"/>
+          <p:cNvSpPr>
+            <a:spLocks noGrp="1"/>
+          </p:cNvSpPr>
+          <p:nvPr>
+            <p:ph type="hdr" sz="quarter"/>
+          </p:nvPr>
+        </p:nvSpPr>
+        <p:spPr>
+          <a:xfrm>
+            <a:off x="0" y="0"/>
+            <a:ext cx="2971800" cy="458788"/>
+          </a:xfrm>
+          <a:prstGeom prst="rect">
+            <a:avLst/>
+          </a:prstGeom>
+        </p:spPr>
+        <p:txBody>
+          <a:bodyPr vert="horz" lIns="91440" tIns="45720" rIns="91440" bIns="45720" rtlCol="0"/>
+          <a:lstStyle>
+            <a:lvl1pPr algn="l">
+              <a:defRPr sz="1200"/>
+            </a:lvl1pPr>
+          </a:lstStyle>
+          <a:p>
+            <a:endParaRPr lang="en-US"/>
+          </a:p>
+        </p:txBody>
+      </p:sp>
+      <p:sp>
+        <p:nvSpPr>
+          <p:cNvPr id="3" name="Date Placeholder 2"/>
+          <p:cNvSpPr>
+            <a:spLocks noGrp="1"/>
+          </p:cNvSpPr>
+          <p:nvPr>
+            <p:ph type="dt" idx="1"/>
+          </p:nvPr>
+        </p:nvSpPr>
+        <p:spPr>
+          <a:xfrm>
+            <a:off x="3884613" y="0"/>
+            <a:ext cx="2971800" cy="458788"/>
+          </a:xfrm>
+          <a:prstGeom prst="rect">
+            <a:avLst/>
+          </a:prstGeom>
+        </p:spPr>
+        <p:txBody>
+          <a:bodyPr vert="horz" lIns="91440" tIns="45720" rIns="91440" bIns="45720" rtlCol="0"/>
+          <a:lstStyle>
+            <a:lvl1pPr algn="r">
+              <a:defRPr sz="1200"/>
+            </a:lvl1pPr>
+          </a:lstStyle>
+          <a:p>
+            <a:fld id="{5282F153-3F37-0F45-9E97-73ACFA13230C}" type="datetimeFigureOut">
+              <a:rPr lang="en-US"/>
+              <a:t>7/23/19</a:t>
+            </a:fld>
+            <a:endParaRPr lang="en-US"/>
+          </a:p>
+        </p:txBody>
+      </p:sp>
+      <p:sp>
+        <p:nvSpPr>
+          <p:cNvPr id="4" name="Slide Image Placeholder 3"/>
+          <p:cNvSpPr>
+            <a:spLocks noGrp="1" noRot="1" noChangeAspect="1"/>
+          </p:cNvSpPr>
+          <p:nvPr>
+            <p:ph type="sldImg" idx="2"/>
+          </p:nvPr>
+        </p:nvSpPr>
+        <p:spPr>
+          <a:xfrm>
+            <a:off x="685800" y="1143000"/>
+            <a:ext cx="5486400" cy="3086100"/>
+          </a:xfrm>
+          <a:prstGeom prst="rect">
+            <a:avLst/>
+          </a:prstGeom>
+          <a:noFill/>
+          <a:ln w="12700">
+            <a:solidFill>
+              <a:prstClr val="black"/>
+            </a:solidFill>
+          </a:ln>
+        </p:spPr>
+        <p:txBody>
+          <a:bodyPr vert="horz" lIns="91440" tIns="45720" rIns="91440" bIns="45720" rtlCol="0" anchor="ctr"/>
+          <a:lstStyle/>
+          <a:p>
+            <a:endParaRPr lang="en-US"/>
+          </a:p>
+        </p:txBody>
+      </p:sp>
+      <p:sp>
+        <p:nvSpPr>
+          <p:cNvPr id="5" name="Notes Placeholder 4"/>
+          <p:cNvSpPr>
+            <a:spLocks noGrp="1"/>
+          </p:cNvSpPr>
+          <p:nvPr>
+            <p:ph type="body" sz="quarter" idx="3"/>
+          </p:nvPr>
+        </p:nvSpPr>
+        <p:spPr>
+          <a:xfrm>
+            <a:off x="685800" y="4400550"/>
+            <a:ext cx="5486400" cy="3600450"/>
+          </a:xfrm>
+          <a:prstGeom prst="rect">
+            <a:avLst/>
+          </a:prstGeom>
+        </p:spPr>
+        <p:txBody>
+          <a:bodyPr vert="horz" lIns="91440" tIns="45720" rIns="91440" bIns="45720" rtlCol="0"/>
+          <a:lstStyle/>
+          <a:p>
+            <a:pPr lvl="0"/>
+            <a:r>
+              <a:rPr lang="en-US"/>
+              <a:t>Click to edit Master text styles</a:t>
+            </a:r>
+          </a:p>
+          <a:p>
+            <a:pPr lvl="1"/>
+            <a:r>
+              <a:rPr lang="en-US"/>
+              <a:t>Second level</a:t>
+            </a:r>
+          </a:p>
+          <a:p>
+            <a:pPr lvl="2"/>
+            <a:r>
+              <a:rPr lang="en-US"/>
+              <a:t>Third level</a:t>
+            </a:r>
+          </a:p>
+          <a:p>
+            <a:pPr lvl="3"/>
+            <a:r>
+              <a:rPr lang="en-US"/>
+              <a:t>Fourth level</a:t>
+            </a:r>
+          </a:p>
+          <a:p>
+            <a:pPr lvl="4"/>
+            <a:r>
+              <a:rPr lang="en-US"/>
+              <a:t>Fifth level</a:t>
+            </a:r>
+          </a:p>
+        </p:txBody>
+      </p:sp>
+      <p:sp>
+        <p:nvSpPr>
+          <p:cNvPr id="6" name="Footer Placeholder 5"/>
+          <p:cNvSpPr>
+            <a:spLocks noGrp="1"/>
+          </p:cNvSpPr>
+          <p:nvPr>
+            <p:ph type="ftr" sz="quarter" idx="4"/>
+          </p:nvPr>
+        </p:nvSpPr>
+        <p:spPr>
+          <a:xfrm>
+            <a:off x="0" y="8685213"/>
+            <a:ext cx="2971800" cy="458787"/>
+          </a:xfrm>
+          <a:prstGeom prst="rect">
+            <a:avLst/>
+          </a:prstGeom>
+        </p:spPr>
+        <p:txBody>
+          <a:bodyPr vert="horz" lIns="91440" tIns="45720" rIns="91440" bIns="45720" rtlCol="0" anchor="b"/>
+          <a:lstStyle>
+            <a:lvl1pPr algn="l">
+              <a:defRPr sz="1200"/>
+            </a:lvl1pPr>
+          </a:lstStyle>
+          <a:p>
+            <a:endParaRPr lang="en-US"/>
+          </a:p>
+        </p:txBody>
+      </p:sp>
+      <p:sp>
+        <p:nvSpPr>
+          <p:cNvPr id="7" name="Slide Number Placeholder 6"/>
+          <p:cNvSpPr>
+            <a:spLocks noGrp="1"/>
+          </p:cNvSpPr>
+          <p:nvPr>
+            <p:ph type="sldNum" sz="quarter" idx="5"/>
+          </p:nvPr>
+        </p:nvSpPr>
+        <p:spPr>
+          <a:xfrm>
+            <a:off x="3884613" y="8685213"/>
+            <a:ext cx="2971800" cy="458787"/>
+          </a:xfrm>
+          <a:prstGeom prst="rect">
+            <a:avLst/>
+          </a:prstGeom>
+        </p:spPr>
+        <p:txBody>
+          <a:bodyPr vert="horz" lIns="91440" tIns="45720" rIns="91440" bIns="45720" rtlCol="0" anchor="b"/>
+          <a:lstStyle>
+            <a:lvl1pPr algn="r">
+              <a:defRPr sz="1200"/>
+            </a:lvl1pPr>
+          </a:lstStyle>
+          <a:p>
+            <a:fld id="{CE5E9CC1-C706-0F49-92D6-E571CC5EEA8F}" type="slidenum">
+              <a:rPr lang="en-US"/>
+              <a:t>‹#›</a:t>
+            </a:fld>
+            <a:endParaRPr lang="en-US"/>
+          </a:p>
+        </p:txBody>
+      </p:sp>
     </p:spTree>
     <p:extLst>
       <p:ext uri="{BB962C8B-B14F-4D97-AF65-F5344CB8AC3E}">
-        <p14:creationId xmlns:p14="http://schemas.microsoft.com/office/powerpoint/2010/main" val="3108157765"/>
+        <p14:creationId xmlns:p14="http://schemas.microsoft.com/office/powerpoint/2010/main" val="1024086991"/>
       </p:ext>
     </p:extLst>
   </p:cSld>
@@ -289,6 +508,10 @@
           <a:bodyPr/>
           <a:lstStyle/>
           <a:p>
+            <a:r>
+              <a:rPr lang="en-US" dirty="0"/>
+              <a:t/>
+            </a:r>
             <a:endParaRPr lang="en-US" dirty="0"/>
           </a:p>
         </p:txBody>
@@ -373,6 +596,10 @@
           <a:bodyPr/>
           <a:lstStyle/>
           <a:p>
+            <a:r>
+              <a:rPr lang="en-US" dirty="0"/>
+              <a:t/>
+            </a:r>
             <a:endParaRPr lang="en-US" dirty="0"/>
           </a:p>
         </p:txBody>
@@ -457,6 +684,10 @@
           <a:bodyPr/>
           <a:lstStyle/>
           <a:p>
+            <a:r>
+              <a:rPr lang="en-US" dirty="0"/>
+              <a:t/>
+            </a:r>
             <a:endParaRPr lang="en-US" dirty="0"/>
           </a:p>
         </p:txBody>
@@ -541,6 +772,10 @@
           <a:bodyPr/>
           <a:lstStyle/>
           <a:p>
+            <a:r>
+              <a:rPr lang="en-US" dirty="0"/>
+              <a:t/>
+            </a:r>
             <a:endParaRPr lang="en-US" dirty="0"/>
           </a:p>
         </p:txBody>
@@ -625,6 +860,10 @@
           <a:bodyPr/>
           <a:lstStyle/>
           <a:p>
+            <a:r>
+              <a:rPr lang="en-US" dirty="0"/>
+              <a:t/>
+            </a:r>
             <a:endParaRPr lang="en-US" dirty="0"/>
           </a:p>
         </p:txBody>
@@ -709,6 +948,10 @@
           <a:bodyPr/>
           <a:lstStyle/>
           <a:p>
+            <a:r>
+              <a:rPr lang="en-US" dirty="0"/>
+              <a:t/>
+            </a:r>
             <a:endParaRPr lang="en-US" dirty="0"/>
           </a:p>
         </p:txBody>
@@ -793,6 +1036,10 @@
           <a:bodyPr/>
           <a:lstStyle/>
           <a:p>
+            <a:r>
+              <a:rPr lang="en-US" dirty="0"/>
+              <a:t/>
+            </a:r>
             <a:endParaRPr lang="en-US" dirty="0"/>
           </a:p>
         </p:txBody>
@@ -877,6 +1124,10 @@
           <a:bodyPr/>
           <a:lstStyle/>
           <a:p>
+            <a:r>
+              <a:rPr lang="en-US" dirty="0"/>
+              <a:t/>
+            </a:r>
             <a:endParaRPr lang="en-US" dirty="0"/>
           </a:p>
         </p:txBody>
@@ -961,6 +1212,10 @@
           <a:bodyPr/>
           <a:lstStyle/>
           <a:p>
+            <a:r>
+              <a:rPr lang="en-US" dirty="0"/>
+              <a:t/>
+            </a:r>
             <a:endParaRPr lang="en-US" dirty="0"/>
           </a:p>
         </p:txBody>
@@ -1034,11 +1289,6 @@
 <file path=ppt/slideMasters/slideMaster1.xml><?xml version="1.0" encoding="utf-8"?>
 <p:sldMaster xmlns:a="http://schemas.openxmlformats.org/drawingml/2006/main" xmlns:r="http://schemas.openxmlformats.org/officeDocument/2006/relationships" xmlns:p="http://schemas.openxmlformats.org/presentationml/2006/main">
   <p:cSld>
-    <p:bg>
-      <p:bgRef idx="1001">
-        <a:schemeClr val="bg1"/>
-      </p:bgRef>
-    </p:bg>
     <p:spTree>
       <p:nvGrpSpPr>
         <p:cNvPr id="1" name=""/>
@@ -1321,7 +1571,6 @@
         <a:solidFill>
           <a:srgbClr val="F8FAFC"/>
         </a:solidFill>
-        <a:effectLst/>
       </p:bgPr>
     </p:bg>
     <p:spTree>
@@ -1359,7 +1608,7 @@
           <a:bodyPr wrap="square" rtlCol="0" anchor="ctr"/>
           <a:lstStyle/>
           <a:p>
-            <a:pPr marL="0" indent="0" algn="ctr">
+            <a:pPr algn="ctr" indent="0" marL="0">
               <a:buNone/>
             </a:pPr>
             <a:r>
@@ -1395,7 +1644,7 @@
           <a:bodyPr wrap="square" rtlCol="0" anchor="ctr"/>
           <a:lstStyle/>
           <a:p>
-            <a:pPr marL="0" indent="0" algn="ctr">
+            <a:pPr algn="ctr" indent="0" marL="0">
               <a:buNone/>
             </a:pPr>
             <a:r>
@@ -1431,7 +1680,7 @@
           <a:bodyPr wrap="square" rtlCol="0" anchor="ctr"/>
           <a:lstStyle/>
           <a:p>
-            <a:pPr marL="0" indent="0" algn="ctr">
+            <a:pPr algn="ctr" indent="0" marL="0">
               <a:buNone/>
             </a:pPr>
             <a:r>
@@ -1487,7 +1736,7 @@
           <a:bodyPr wrap="square" rtlCol="0" anchor="ctr"/>
           <a:lstStyle/>
           <a:p>
-            <a:pPr marL="0" indent="0" algn="ctr">
+            <a:pPr algn="ctr" indent="0" marL="0">
               <a:buNone/>
             </a:pPr>
             <a:r>
@@ -1523,7 +1772,7 @@
           <a:bodyPr wrap="square" rtlCol="0" anchor="ctr"/>
           <a:lstStyle/>
           <a:p>
-            <a:pPr marL="0" indent="0" algn="ctr">
+            <a:pPr algn="ctr" indent="0" marL="0">
               <a:buNone/>
             </a:pPr>
             <a:r>
@@ -1534,6 +1783,9 @@
               </a:rPr>
               <a:t>Estudiante: </a:t>
             </a:r>
+            <a:pPr algn="ctr" indent="0" marL="0">
+              <a:buNone/>
+            </a:pPr>
             <a:r>
               <a:rPr lang="en-US" sz="1600" dirty="0">
                 <a:solidFill>
@@ -1567,7 +1819,7 @@
           <a:bodyPr wrap="square" rtlCol="0" anchor="ctr"/>
           <a:lstStyle/>
           <a:p>
-            <a:pPr marL="0" indent="0" algn="ctr">
+            <a:pPr algn="ctr" indent="0" marL="0">
               <a:buNone/>
             </a:pPr>
             <a:r>
@@ -1598,7 +1850,6 @@
         <a:solidFill>
           <a:srgbClr val="F8FAFC"/>
         </a:solidFill>
-        <a:effectLst/>
       </p:bgPr>
     </p:bg>
     <p:spTree>
@@ -1636,7 +1887,7 @@
           <a:bodyPr wrap="square" rtlCol="0" anchor="ctr"/>
           <a:lstStyle/>
           <a:p>
-            <a:pPr marL="0" indent="0">
+            <a:pPr indent="0" marL="0">
               <a:buNone/>
             </a:pPr>
             <a:r>
@@ -1672,7 +1923,7 @@
           <a:bodyPr wrap="square" rtlCol="0" anchor="ctr"/>
           <a:lstStyle/>
           <a:p>
-            <a:pPr marL="0" indent="0">
+            <a:pPr indent="0" marL="0">
               <a:buNone/>
             </a:pPr>
             <a:r>
@@ -1708,7 +1959,7 @@
           <a:bodyPr wrap="square" rtlCol="0" anchor="ctr"/>
           <a:lstStyle/>
           <a:p>
-            <a:pPr marL="0" indent="0">
+            <a:pPr indent="0" marL="0">
               <a:buNone/>
             </a:pPr>
             <a:r>
@@ -1744,7 +1995,7 @@
           <a:bodyPr wrap="square" rtlCol="0" anchor="ctr"/>
           <a:lstStyle/>
           <a:p>
-            <a:pPr marL="0" indent="0">
+            <a:pPr indent="0" marL="0">
               <a:buNone/>
             </a:pPr>
             <a:r>
@@ -1802,7 +2053,7 @@
           <a:bodyPr wrap="square" rtlCol="0" anchor="ctr"/>
           <a:lstStyle/>
           <a:p>
-            <a:pPr marL="0" indent="0" algn="ctr">
+            <a:pPr algn="ctr" indent="0" marL="0">
               <a:buNone/>
             </a:pPr>
             <a:r>
@@ -1860,7 +2111,7 @@
           <a:bodyPr wrap="square" rtlCol="0" anchor="ctr"/>
           <a:lstStyle/>
           <a:p>
-            <a:pPr marL="0" indent="0" algn="ctr">
+            <a:pPr algn="ctr" indent="0" marL="0">
               <a:buNone/>
             </a:pPr>
             <a:r>
@@ -1918,7 +2169,7 @@
           <a:bodyPr wrap="square" rtlCol="0" anchor="ctr"/>
           <a:lstStyle/>
           <a:p>
-            <a:pPr marL="0" indent="0" algn="ctr">
+            <a:pPr algn="ctr" indent="0" marL="0">
               <a:buNone/>
             </a:pPr>
             <a:r>
@@ -1954,7 +2205,7 @@
           <a:bodyPr wrap="square" rtlCol="0" anchor="ctr"/>
           <a:lstStyle/>
           <a:p>
-            <a:pPr marL="0" indent="0">
+            <a:pPr indent="0" marL="0">
               <a:buNone/>
             </a:pPr>
             <a:r>
@@ -1990,7 +2241,7 @@
           <a:bodyPr wrap="square" rtlCol="0" anchor="ctr"/>
           <a:lstStyle/>
           <a:p>
-            <a:pPr marL="0" indent="0">
+            <a:pPr indent="0" marL="0">
               <a:lnSpc>
                 <a:spcPts val="2200"/>
               </a:lnSpc>
@@ -2004,6 +2255,12 @@
               </a:rPr>
               <a:t>✓ </a:t>
             </a:r>
+            <a:pPr indent="0" marL="0">
+              <a:lnSpc>
+                <a:spcPts val="2200"/>
+              </a:lnSpc>
+              <a:buNone/>
+            </a:pPr>
             <a:r>
               <a:rPr lang="en-US" sz="1400" dirty="0">
                 <a:solidFill>
@@ -2013,6 +2270,12 @@
               <a:t>Crea, edita y elimina tareas fácilmente
 </a:t>
             </a:r>
+            <a:pPr indent="0" marL="0">
+              <a:lnSpc>
+                <a:spcPts val="2200"/>
+              </a:lnSpc>
+              <a:buNone/>
+            </a:pPr>
             <a:r>
               <a:rPr lang="en-US" sz="1400" b="1" dirty="0">
                 <a:solidFill>
@@ -2021,6 +2284,12 @@
               </a:rPr>
               <a:t>✓ </a:t>
             </a:r>
+            <a:pPr indent="0" marL="0">
+              <a:lnSpc>
+                <a:spcPts val="2200"/>
+              </a:lnSpc>
+              <a:buNone/>
+            </a:pPr>
             <a:r>
               <a:rPr lang="en-US" sz="1400" dirty="0">
                 <a:solidFill>
@@ -2030,6 +2299,12 @@
               <a:t>Arrastra y suelta tareas entre columnas
 </a:t>
             </a:r>
+            <a:pPr indent="0" marL="0">
+              <a:lnSpc>
+                <a:spcPts val="2200"/>
+              </a:lnSpc>
+              <a:buNone/>
+            </a:pPr>
             <a:r>
               <a:rPr lang="en-US" sz="1400" b="1" dirty="0">
                 <a:solidFill>
@@ -2038,6 +2313,12 @@
               </a:rPr>
               <a:t>✓ </a:t>
             </a:r>
+            <a:pPr indent="0" marL="0">
+              <a:lnSpc>
+                <a:spcPts val="2200"/>
+              </a:lnSpc>
+              <a:buNone/>
+            </a:pPr>
             <a:r>
               <a:rPr lang="en-US" sz="1400" dirty="0">
                 <a:solidFill>
@@ -2047,6 +2328,12 @@
               <a:t>Inicio de sesión seguro con JWT
 </a:t>
             </a:r>
+            <a:pPr indent="0" marL="0">
+              <a:lnSpc>
+                <a:spcPts val="2200"/>
+              </a:lnSpc>
+              <a:buNone/>
+            </a:pPr>
             <a:r>
               <a:rPr lang="en-US" sz="1400" b="1" dirty="0">
                 <a:solidFill>
@@ -2055,6 +2342,12 @@
               </a:rPr>
               <a:t>✓ </a:t>
             </a:r>
+            <a:pPr indent="0" marL="0">
+              <a:lnSpc>
+                <a:spcPts val="2200"/>
+              </a:lnSpc>
+              <a:buNone/>
+            </a:pPr>
             <a:r>
               <a:rPr lang="en-US" sz="1400" dirty="0">
                 <a:solidFill>
@@ -2064,6 +2357,12 @@
               <a:t>Control de acceso: usuarios y administradores
 </a:t>
             </a:r>
+            <a:pPr indent="0" marL="0">
+              <a:lnSpc>
+                <a:spcPts val="2200"/>
+              </a:lnSpc>
+              <a:buNone/>
+            </a:pPr>
             <a:r>
               <a:rPr lang="en-US" sz="1400" b="1" dirty="0">
                 <a:solidFill>
@@ -2072,6 +2371,12 @@
               </a:rPr>
               <a:t>✓ </a:t>
             </a:r>
+            <a:pPr indent="0" marL="0">
+              <a:lnSpc>
+                <a:spcPts val="2200"/>
+              </a:lnSpc>
+              <a:buNone/>
+            </a:pPr>
             <a:r>
               <a:rPr lang="en-US" sz="1400" dirty="0">
                 <a:solidFill>
@@ -2100,7 +2405,6 @@
         <a:solidFill>
           <a:srgbClr val="F8FAFC"/>
         </a:solidFill>
-        <a:effectLst/>
       </p:bgPr>
     </p:bg>
     <p:spTree>
@@ -2138,7 +2442,7 @@
           <a:bodyPr wrap="square" rtlCol="0" anchor="ctr"/>
           <a:lstStyle/>
           <a:p>
-            <a:pPr marL="0" indent="0">
+            <a:pPr indent="0" marL="0">
               <a:buNone/>
             </a:pPr>
             <a:r>
@@ -2165,7 +2469,9 @@
             <a:ext cx="7315200" cy="4114800"/>
           </a:xfrm>
           <a:prstGeom prst="rect">
-            <a:avLst/>
+            <a:avLst>
+              <a:gd name="adj" fmla="val 133333"/>
+            </a:avLst>
           </a:prstGeom>
           <a:solidFill>
             <a:srgbClr val="E2E8F0"/>
@@ -2199,7 +2505,7 @@
           <a:bodyPr wrap="square" rtlCol="0" anchor="ctr"/>
           <a:lstStyle/>
           <a:p>
-            <a:pPr marL="0" indent="0" algn="ctr">
+            <a:pPr algn="ctr" indent="0" marL="0">
               <a:buNone/>
             </a:pPr>
             <a:r>
@@ -2235,7 +2541,7 @@
           <a:bodyPr wrap="square" rtlCol="0" anchor="ctr"/>
           <a:lstStyle/>
           <a:p>
-            <a:pPr marL="0" indent="0" algn="ctr">
+            <a:pPr algn="ctr" indent="0" marL="0">
               <a:buNone/>
             </a:pPr>
             <a:r>
@@ -2271,7 +2577,7 @@
           <a:bodyPr wrap="square" rtlCol="0" anchor="ctr"/>
           <a:lstStyle/>
           <a:p>
-            <a:pPr marL="0" indent="0">
+            <a:pPr indent="0" marL="0">
               <a:buNone/>
             </a:pPr>
             <a:r>
@@ -2302,7 +2608,6 @@
         <a:solidFill>
           <a:srgbClr val="F8FAFC"/>
         </a:solidFill>
-        <a:effectLst/>
       </p:bgPr>
     </p:bg>
     <p:spTree>
@@ -2340,7 +2645,7 @@
           <a:bodyPr wrap="square" rtlCol="0" anchor="ctr"/>
           <a:lstStyle/>
           <a:p>
-            <a:pPr marL="0" indent="0">
+            <a:pPr indent="0" marL="0">
               <a:buNone/>
             </a:pPr>
             <a:r>
@@ -2376,7 +2681,7 @@
           <a:bodyPr wrap="square" rtlCol="0" anchor="ctr"/>
           <a:lstStyle/>
           <a:p>
-            <a:pPr marL="0" indent="0">
+            <a:pPr indent="0" marL="0">
               <a:buNone/>
             </a:pPr>
             <a:r>
@@ -2412,7 +2717,7 @@
           <a:bodyPr wrap="square" rtlCol="0" anchor="ctr"/>
           <a:lstStyle/>
           <a:p>
-            <a:pPr marL="0" indent="0">
+            <a:pPr indent="0" marL="0">
               <a:buNone/>
             </a:pPr>
             <a:r>
@@ -2448,7 +2753,7 @@
           <a:bodyPr wrap="square" rtlCol="0" anchor="ctr"/>
           <a:lstStyle/>
           <a:p>
-            <a:pPr marL="0" indent="0">
+            <a:pPr indent="0" marL="0">
               <a:buNone/>
             </a:pPr>
             <a:r>
@@ -2484,7 +2789,7 @@
           <a:bodyPr wrap="square" rtlCol="0" anchor="ctr"/>
           <a:lstStyle/>
           <a:p>
-            <a:pPr marL="0" indent="0">
+            <a:pPr indent="0" marL="0">
               <a:lnSpc>
                 <a:spcPts val="2200"/>
               </a:lnSpc>
@@ -2498,116 +2803,146 @@
               </a:rPr>
               <a:t>• </a:t>
             </a:r>
-            <a:r>
-              <a:rPr lang="en-US" sz="1400" dirty="0">
-                <a:solidFill>
-                  <a:srgbClr val="1E293B"/>
-                </a:solidFill>
-              </a:rPr>
-              <a:t>Reducción de sobrecarga cognitiva
-</a:t>
-            </a:r>
-            <a:r>
-              <a:rPr lang="en-US" sz="1400" b="1" dirty="0">
-                <a:solidFill>
-                  <a:srgbClr val="1E293B"/>
-                </a:solidFill>
-              </a:rPr>
-              <a:t>• </a:t>
-            </a:r>
-            <a:r>
-              <a:rPr lang="en-US" sz="1400" dirty="0">
-                <a:solidFill>
-                  <a:srgbClr val="1E293B"/>
-                </a:solidFill>
-              </a:rPr>
-              <a:t>Arrastrar y soltar es más rápido que formularios
-</a:t>
-            </a:r>
-            <a:r>
-              <a:rPr lang="en-US" sz="1400" b="1" dirty="0">
-                <a:solidFill>
-                  <a:srgbClr val="1E293B"/>
-                </a:solidFill>
-              </a:rPr>
-              <a:t>• </a:t>
-            </a:r>
-            <a:r>
-              <a:rPr lang="en-US" sz="1400" dirty="0">
-                <a:solidFill>
-                  <a:srgbClr val="1E293B"/>
-                </a:solidFill>
-              </a:rPr>
-              <a:t>Identifica cuellos de botella fácilmente</a:t>
-            </a:r>
-            <a:endParaRPr lang="en-US" sz="1400" dirty="0"/>
-          </a:p>
-        </p:txBody>
-      </p:sp>
-      <p:sp>
-        <p:nvSpPr>
-          <p:cNvPr id="7" name="Text 5"/>
-          <p:cNvSpPr/>
-          <p:nvPr/>
-        </p:nvSpPr>
-        <p:spPr>
-          <a:xfrm>
-            <a:off x="457200" y="3657600"/>
-            <a:ext cx="8229600" cy="457200"/>
-          </a:xfrm>
-          <a:prstGeom prst="rect">
-            <a:avLst/>
-          </a:prstGeom>
-          <a:noFill/>
-          <a:ln/>
-        </p:spPr>
-        <p:txBody>
-          <a:bodyPr wrap="square" rtlCol="0" anchor="ctr"/>
-          <a:lstStyle/>
-          <a:p>
-            <a:pPr marL="0" indent="0">
-              <a:buNone/>
-            </a:pPr>
-            <a:r>
-              <a:rPr lang="en-US" sz="1800" b="1" dirty="0">
-                <a:solidFill>
-                  <a:srgbClr val="1E3A5F"/>
-                </a:solidFill>
-              </a:rPr>
-              <a:t>Accesible y Gratuito</a:t>
-            </a:r>
-            <a:endParaRPr lang="en-US" sz="1800" dirty="0"/>
-          </a:p>
-        </p:txBody>
-      </p:sp>
-      <p:sp>
-        <p:nvSpPr>
-          <p:cNvPr id="8" name="Text 6"/>
-          <p:cNvSpPr/>
-          <p:nvPr/>
-        </p:nvSpPr>
-        <p:spPr>
-          <a:xfrm>
-            <a:off x="457200" y="4114800"/>
-            <a:ext cx="8229600" cy="914400"/>
-          </a:xfrm>
-          <a:prstGeom prst="rect">
-            <a:avLst/>
-          </a:prstGeom>
-          <a:noFill/>
-          <a:ln/>
-        </p:spPr>
-        <p:txBody>
-          <a:bodyPr wrap="square" rtlCol="0" anchor="ctr"/>
-          <a:lstStyle/>
-          <a:p>
-            <a:pPr marL="0" indent="0">
+            <a:pPr indent="0" marL="0">
               <a:lnSpc>
                 <a:spcPts val="2200"/>
               </a:lnSpc>
               <a:buNone/>
             </a:pPr>
             <a:r>
+              <a:rPr lang="en-US" sz="1400" dirty="0">
+                <a:solidFill>
+                  <a:srgbClr val="1E293B"/>
+                </a:solidFill>
+              </a:rPr>
+              <a:t>Reducción de sobrecarga cognitiva
+</a:t>
+            </a:r>
+            <a:pPr indent="0" marL="0">
+              <a:lnSpc>
+                <a:spcPts val="2200"/>
+              </a:lnSpc>
+              <a:buNone/>
+            </a:pPr>
+            <a:r>
+              <a:rPr lang="en-US" sz="1400" b="1" dirty="0">
+                <a:solidFill>
+                  <a:srgbClr val="1E293B"/>
+                </a:solidFill>
+              </a:rPr>
+              <a:t>• </a:t>
+            </a:r>
+            <a:pPr indent="0" marL="0">
+              <a:lnSpc>
+                <a:spcPts val="2200"/>
+              </a:lnSpc>
+              <a:buNone/>
+            </a:pPr>
+            <a:r>
+              <a:rPr lang="en-US" sz="1400" dirty="0">
+                <a:solidFill>
+                  <a:srgbClr val="1E293B"/>
+                </a:solidFill>
+              </a:rPr>
+              <a:t>Arrastrar y soltar es más rápido que formularios
+</a:t>
+            </a:r>
+            <a:pPr indent="0" marL="0">
+              <a:lnSpc>
+                <a:spcPts val="2200"/>
+              </a:lnSpc>
+              <a:buNone/>
+            </a:pPr>
+            <a:r>
+              <a:rPr lang="en-US" sz="1400" b="1" dirty="0">
+                <a:solidFill>
+                  <a:srgbClr val="1E293B"/>
+                </a:solidFill>
+              </a:rPr>
+              <a:t>• </a:t>
+            </a:r>
+            <a:pPr indent="0" marL="0">
+              <a:lnSpc>
+                <a:spcPts val="2200"/>
+              </a:lnSpc>
+              <a:buNone/>
+            </a:pPr>
+            <a:r>
+              <a:rPr lang="en-US" sz="1400" dirty="0">
+                <a:solidFill>
+                  <a:srgbClr val="1E293B"/>
+                </a:solidFill>
+              </a:rPr>
+              <a:t>Identifica cuellos de botella fácilmente</a:t>
+            </a:r>
+            <a:endParaRPr lang="en-US" sz="1400" dirty="0"/>
+          </a:p>
+        </p:txBody>
+      </p:sp>
+      <p:sp>
+        <p:nvSpPr>
+          <p:cNvPr id="7" name="Text 5"/>
+          <p:cNvSpPr/>
+          <p:nvPr/>
+        </p:nvSpPr>
+        <p:spPr>
+          <a:xfrm>
+            <a:off x="457200" y="3657600"/>
+            <a:ext cx="8229600" cy="457200"/>
+          </a:xfrm>
+          <a:prstGeom prst="rect">
+            <a:avLst/>
+          </a:prstGeom>
+          <a:noFill/>
+          <a:ln/>
+        </p:spPr>
+        <p:txBody>
+          <a:bodyPr wrap="square" rtlCol="0" anchor="ctr"/>
+          <a:lstStyle/>
+          <a:p>
+            <a:pPr indent="0" marL="0">
+              <a:buNone/>
+            </a:pPr>
+            <a:r>
+              <a:rPr lang="en-US" sz="1800" b="1" dirty="0">
+                <a:solidFill>
+                  <a:srgbClr val="1E3A5F"/>
+                </a:solidFill>
+              </a:rPr>
+              <a:t>Accesible y Gratuito</a:t>
+            </a:r>
+            <a:endParaRPr lang="en-US" sz="1800" dirty="0"/>
+          </a:p>
+        </p:txBody>
+      </p:sp>
+      <p:sp>
+        <p:nvSpPr>
+          <p:cNvPr id="8" name="Text 6"/>
+          <p:cNvSpPr/>
+          <p:nvPr/>
+        </p:nvSpPr>
+        <p:spPr>
+          <a:xfrm>
+            <a:off x="457200" y="4114800"/>
+            <a:ext cx="8229600" cy="914400"/>
+          </a:xfrm>
+          <a:prstGeom prst="rect">
+            <a:avLst/>
+          </a:prstGeom>
+          <a:noFill/>
+          <a:ln/>
+        </p:spPr>
+        <p:txBody>
+          <a:bodyPr wrap="square" rtlCol="0" anchor="ctr"/>
+          <a:lstStyle/>
+          <a:p>
+            <a:pPr indent="0" marL="0">
+              <a:lnSpc>
+                <a:spcPts val="2200"/>
+              </a:lnSpc>
+              <a:buNone/>
+            </a:pPr>
+            <a:r>
               <a:rPr lang="en-US" b="1" dirty="0">
                 <a:solidFill>
                   <a:srgbClr val="1E293B"/>
@@ -2615,6 +2950,12 @@
               </a:rPr>
               <a:t>• </a:t>
             </a:r>
+            <a:pPr indent="0" marL="0">
+              <a:lnSpc>
+                <a:spcPts val="2200"/>
+              </a:lnSpc>
+              <a:buNone/>
+            </a:pPr>
             <a:r>
               <a:rPr lang="en-US" sz="1400" dirty="0">
                 <a:solidFill>
@@ -2624,6 +2965,12 @@
               <a:t>Sin costos de licencia
 </a:t>
             </a:r>
+            <a:pPr indent="0" marL="0">
+              <a:lnSpc>
+                <a:spcPts val="2200"/>
+              </a:lnSpc>
+              <a:buNone/>
+            </a:pPr>
             <a:r>
               <a:rPr lang="en-US" sz="1400" b="1" dirty="0">
                 <a:solidFill>
@@ -2632,6 +2979,12 @@
               </a:rPr>
               <a:t>• </a:t>
             </a:r>
+            <a:pPr indent="0" marL="0">
+              <a:lnSpc>
+                <a:spcPts val="2200"/>
+              </a:lnSpc>
+              <a:buNone/>
+            </a:pPr>
             <a:r>
               <a:rPr lang="en-US" sz="1400" dirty="0">
                 <a:solidFill>
@@ -2641,6 +2994,12 @@
               <a:t>Funciona en cualquier navegador
 </a:t>
             </a:r>
+            <a:pPr indent="0" marL="0">
+              <a:lnSpc>
+                <a:spcPts val="2200"/>
+              </a:lnSpc>
+              <a:buNone/>
+            </a:pPr>
             <a:r>
               <a:rPr lang="en-US" sz="1400" b="1" dirty="0">
                 <a:solidFill>
@@ -2649,6 +3008,12 @@
               </a:rPr>
               <a:t>• </a:t>
             </a:r>
+            <a:pPr indent="0" marL="0">
+              <a:lnSpc>
+                <a:spcPts val="2200"/>
+              </a:lnSpc>
+              <a:buNone/>
+            </a:pPr>
             <a:r>
               <a:rPr lang="en-US" sz="1400" dirty="0">
                 <a:solidFill>
@@ -2677,7 +3042,6 @@
         <a:solidFill>
           <a:srgbClr val="F8FAFC"/>
         </a:solidFill>
-        <a:effectLst/>
       </p:bgPr>
     </p:bg>
     <p:spTree>
@@ -2715,7 +3079,7 @@
           <a:bodyPr wrap="square" rtlCol="0" anchor="ctr"/>
           <a:lstStyle/>
           <a:p>
-            <a:pPr marL="0" indent="0">
+            <a:pPr indent="0" marL="0">
               <a:buNone/>
             </a:pPr>
             <a:r>
@@ -2746,27 +3110,15 @@
         </p:nvGraphicFramePr>
         <p:xfrm>
           <a:off x="731520" y="1188720"/>
-          <a:ext cx="7680960" cy="3337560"/>
+          <a:ext cx="7680960" cy="3657600"/>
         </p:xfrm>
         <a:graphic>
           <a:graphicData uri="http://schemas.openxmlformats.org/drawingml/2006/table">
             <a:tbl>
               <a:tblPr/>
               <a:tblGrid>
-                <a:gridCol w="3200400">
-                  <a:extLst>
-                    <a:ext uri="{9D8B030D-6E8A-4147-A177-3AD203B41FA5}">
-                      <a16:colId xmlns:a16="http://schemas.microsoft.com/office/drawing/2014/main" val="20000"/>
-                    </a:ext>
-                  </a:extLst>
-                </a:gridCol>
-                <a:gridCol w="4480560">
-                  <a:extLst>
-                    <a:ext uri="{9D8B030D-6E8A-4147-A177-3AD203B41FA5}">
-                      <a16:colId xmlns:a16="http://schemas.microsoft.com/office/drawing/2014/main" val="20001"/>
-                    </a:ext>
-                  </a:extLst>
-                </a:gridCol>
+                <a:gridCol w="3200400"/>
+                <a:gridCol w="4480560"/>
               </a:tblGrid>
               <a:tr h="457200">
                 <a:tc>
@@ -2774,7 +3126,7 @@
                     <a:bodyPr/>
                     <a:lstStyle/>
                     <a:p>
-                      <a:pPr marL="0" indent="0" algn="ctr">
+                      <a:pPr algn="ctr" indent="0" marL="0">
                         <a:buNone/>
                       </a:pPr>
                       <a:r>
@@ -2788,7 +3140,7 @@
                       <a:endParaRPr lang="en-US" sz="1400" dirty="0"/>
                     </a:p>
                   </a:txBody>
-                  <a:tcPr anchor="ctr">
+                  <a:tcPr marL="91440" marR="91440" marT="45720" marB="45720" anchor="ctr">
                     <a:lnL w="6350" cap="flat" cmpd="sng" algn="ctr">
                       <a:solidFill>
                         <a:srgbClr val="E2E8F0"/>
@@ -2835,7 +3187,7 @@
                     <a:bodyPr/>
                     <a:lstStyle/>
                     <a:p>
-                      <a:pPr marL="0" indent="0" algn="ctr">
+                      <a:pPr algn="ctr" indent="0" marL="0">
                         <a:buNone/>
                       </a:pPr>
                       <a:r>
@@ -2849,7 +3201,7 @@
                       <a:endParaRPr lang="en-US" sz="1400" dirty="0"/>
                     </a:p>
                   </a:txBody>
-                  <a:tcPr anchor="ctr">
+                  <a:tcPr marL="91440" marR="91440" marT="45720" marB="45720" anchor="ctr">
                     <a:lnL w="6350" cap="flat" cmpd="sng" algn="ctr">
                       <a:solidFill>
                         <a:srgbClr val="E2E8F0"/>
@@ -2891,11 +3243,6 @@
                     </a:solidFill>
                   </a:tcPr>
                 </a:tc>
-                <a:extLst>
-                  <a:ext uri="{0D108BD9-81ED-4DB2-BD59-A6C34878D82A}">
-                    <a16:rowId xmlns:a16="http://schemas.microsoft.com/office/drawing/2014/main" val="10000"/>
-                  </a:ext>
-                </a:extLst>
               </a:tr>
               <a:tr h="411480">
                 <a:tc>
@@ -2903,7 +3250,7 @@
                     <a:bodyPr/>
                     <a:lstStyle/>
                     <a:p>
-                      <a:pPr marL="0" indent="0" algn="ctr">
+                      <a:pPr algn="ctr" indent="0" marL="0">
                         <a:buNone/>
                       </a:pPr>
                       <a:r>
@@ -2917,7 +3264,7 @@
                       <a:endParaRPr lang="en-US" sz="1400" dirty="0"/>
                     </a:p>
                   </a:txBody>
-                  <a:tcPr anchor="ctr">
+                  <a:tcPr marL="91440" marR="91440" marT="45720" marB="45720" anchor="ctr">
                     <a:lnL w="6350" cap="flat" cmpd="sng" algn="ctr">
                       <a:solidFill>
                         <a:srgbClr val="E2E8F0"/>
@@ -2964,7 +3311,7 @@
                     <a:bodyPr/>
                     <a:lstStyle/>
                     <a:p>
-                      <a:pPr marL="0" indent="0" algn="ctr">
+                      <a:pPr algn="ctr" indent="0" marL="0">
                         <a:buNone/>
                       </a:pPr>
                       <a:r>
@@ -2978,7 +3325,7 @@
                       <a:endParaRPr lang="en-US" sz="1400" dirty="0"/>
                     </a:p>
                   </a:txBody>
-                  <a:tcPr anchor="ctr">
+                  <a:tcPr marL="91440" marR="91440" marT="45720" marB="45720" anchor="ctr">
                     <a:lnL w="6350" cap="flat" cmpd="sng" algn="ctr">
                       <a:solidFill>
                         <a:srgbClr val="E2E8F0"/>
@@ -3020,11 +3367,6 @@
                     </a:solidFill>
                   </a:tcPr>
                 </a:tc>
-                <a:extLst>
-                  <a:ext uri="{0D108BD9-81ED-4DB2-BD59-A6C34878D82A}">
-                    <a16:rowId xmlns:a16="http://schemas.microsoft.com/office/drawing/2014/main" val="10001"/>
-                  </a:ext>
-                </a:extLst>
               </a:tr>
               <a:tr h="411480">
                 <a:tc>
@@ -3032,7 +3374,7 @@
                     <a:bodyPr/>
                     <a:lstStyle/>
                     <a:p>
-                      <a:pPr marL="0" indent="0" algn="ctr">
+                      <a:pPr algn="ctr" indent="0" marL="0">
                         <a:buNone/>
                       </a:pPr>
                       <a:r>
@@ -3046,7 +3388,7 @@
                       <a:endParaRPr lang="en-US" sz="1400" dirty="0"/>
                     </a:p>
                   </a:txBody>
-                  <a:tcPr anchor="ctr">
+                  <a:tcPr marL="91440" marR="91440" marT="45720" marB="45720" anchor="ctr">
                     <a:lnL w="6350" cap="flat" cmpd="sng" algn="ctr">
                       <a:solidFill>
                         <a:srgbClr val="E2E8F0"/>
@@ -3093,7 +3435,7 @@
                     <a:bodyPr/>
                     <a:lstStyle/>
                     <a:p>
-                      <a:pPr marL="0" indent="0" algn="ctr">
+                      <a:pPr algn="ctr" indent="0" marL="0">
                         <a:buNone/>
                       </a:pPr>
                       <a:r>
@@ -3107,7 +3449,7 @@
                       <a:endParaRPr lang="en-US" sz="1400" dirty="0"/>
                     </a:p>
                   </a:txBody>
-                  <a:tcPr anchor="ctr">
+                  <a:tcPr marL="91440" marR="91440" marT="45720" marB="45720" anchor="ctr">
                     <a:lnL w="6350" cap="flat" cmpd="sng" algn="ctr">
                       <a:solidFill>
                         <a:srgbClr val="E2E8F0"/>
@@ -3149,11 +3491,6 @@
                     </a:solidFill>
                   </a:tcPr>
                 </a:tc>
-                <a:extLst>
-                  <a:ext uri="{0D108BD9-81ED-4DB2-BD59-A6C34878D82A}">
-                    <a16:rowId xmlns:a16="http://schemas.microsoft.com/office/drawing/2014/main" val="10002"/>
-                  </a:ext>
-                </a:extLst>
               </a:tr>
               <a:tr h="411480">
                 <a:tc>
@@ -3161,7 +3498,7 @@
                     <a:bodyPr/>
                     <a:lstStyle/>
                     <a:p>
-                      <a:pPr marL="0" indent="0" algn="ctr">
+                      <a:pPr algn="ctr" indent="0" marL="0">
                         <a:buNone/>
                       </a:pPr>
                       <a:r>
@@ -3175,7 +3512,7 @@
                       <a:endParaRPr lang="en-US" sz="1400" dirty="0"/>
                     </a:p>
                   </a:txBody>
-                  <a:tcPr anchor="ctr">
+                  <a:tcPr marL="91440" marR="91440" marT="45720" marB="45720" anchor="ctr">
                     <a:lnL w="6350" cap="flat" cmpd="sng" algn="ctr">
                       <a:solidFill>
                         <a:srgbClr val="E2E8F0"/>
@@ -3222,7 +3559,7 @@
                     <a:bodyPr/>
                     <a:lstStyle/>
                     <a:p>
-                      <a:pPr marL="0" indent="0" algn="ctr">
+                      <a:pPr algn="ctr" indent="0" marL="0">
                         <a:buNone/>
                       </a:pPr>
                       <a:r>
@@ -3236,7 +3573,7 @@
                       <a:endParaRPr lang="en-US" sz="1400" dirty="0"/>
                     </a:p>
                   </a:txBody>
-                  <a:tcPr anchor="ctr">
+                  <a:tcPr marL="91440" marR="91440" marT="45720" marB="45720" anchor="ctr">
                     <a:lnL w="6350" cap="flat" cmpd="sng" algn="ctr">
                       <a:solidFill>
                         <a:srgbClr val="E2E8F0"/>
@@ -3278,11 +3615,6 @@
                     </a:solidFill>
                   </a:tcPr>
                 </a:tc>
-                <a:extLst>
-                  <a:ext uri="{0D108BD9-81ED-4DB2-BD59-A6C34878D82A}">
-                    <a16:rowId xmlns:a16="http://schemas.microsoft.com/office/drawing/2014/main" val="10003"/>
-                  </a:ext>
-                </a:extLst>
               </a:tr>
               <a:tr h="411480">
                 <a:tc>
@@ -3290,7 +3622,7 @@
                     <a:bodyPr/>
                     <a:lstStyle/>
                     <a:p>
-                      <a:pPr marL="0" indent="0" algn="ctr">
+                      <a:pPr algn="ctr" indent="0" marL="0">
                         <a:buNone/>
                       </a:pPr>
                       <a:r>
@@ -3304,7 +3636,7 @@
                       <a:endParaRPr lang="en-US" sz="1400" dirty="0"/>
                     </a:p>
                   </a:txBody>
-                  <a:tcPr anchor="ctr">
+                  <a:tcPr marL="91440" marR="91440" marT="45720" marB="45720" anchor="ctr">
                     <a:lnL w="6350" cap="flat" cmpd="sng" algn="ctr">
                       <a:solidFill>
                         <a:srgbClr val="E2E8F0"/>
@@ -3351,7 +3683,7 @@
                     <a:bodyPr/>
                     <a:lstStyle/>
                     <a:p>
-                      <a:pPr marL="0" indent="0" algn="ctr">
+                      <a:pPr algn="ctr" indent="0" marL="0">
                         <a:buNone/>
                       </a:pPr>
                       <a:r>
@@ -3365,7 +3697,7 @@
                       <a:endParaRPr lang="en-US" sz="1400" dirty="0"/>
                     </a:p>
                   </a:txBody>
-                  <a:tcPr anchor="ctr">
+                  <a:tcPr marL="91440" marR="91440" marT="45720" marB="45720" anchor="ctr">
                     <a:lnL w="6350" cap="flat" cmpd="sng" algn="ctr">
                       <a:solidFill>
                         <a:srgbClr val="E2E8F0"/>
@@ -3407,11 +3739,6 @@
                     </a:solidFill>
                   </a:tcPr>
                 </a:tc>
-                <a:extLst>
-                  <a:ext uri="{0D108BD9-81ED-4DB2-BD59-A6C34878D82A}">
-                    <a16:rowId xmlns:a16="http://schemas.microsoft.com/office/drawing/2014/main" val="10004"/>
-                  </a:ext>
-                </a:extLst>
               </a:tr>
               <a:tr h="411480">
                 <a:tc>
@@ -3419,7 +3746,7 @@
                     <a:bodyPr/>
                     <a:lstStyle/>
                     <a:p>
-                      <a:pPr marL="0" indent="0" algn="ctr">
+                      <a:pPr algn="ctr" indent="0" marL="0">
                         <a:buNone/>
                       </a:pPr>
                       <a:r>
@@ -3433,7 +3760,7 @@
                       <a:endParaRPr lang="en-US" sz="1400" dirty="0"/>
                     </a:p>
                   </a:txBody>
-                  <a:tcPr anchor="ctr">
+                  <a:tcPr marL="91440" marR="91440" marT="45720" marB="45720" anchor="ctr">
                     <a:lnL w="6350" cap="flat" cmpd="sng" algn="ctr">
                       <a:solidFill>
                         <a:srgbClr val="E2E8F0"/>
@@ -3480,7 +3807,7 @@
                     <a:bodyPr/>
                     <a:lstStyle/>
                     <a:p>
-                      <a:pPr marL="0" indent="0" algn="ctr">
+                      <a:pPr algn="ctr" indent="0" marL="0">
                         <a:buNone/>
                       </a:pPr>
                       <a:r>
@@ -3494,7 +3821,7 @@
                       <a:endParaRPr lang="en-US" sz="1400" dirty="0"/>
                     </a:p>
                   </a:txBody>
-                  <a:tcPr anchor="ctr">
+                  <a:tcPr marL="91440" marR="91440" marT="45720" marB="45720" anchor="ctr">
                     <a:lnL w="6350" cap="flat" cmpd="sng" algn="ctr">
                       <a:solidFill>
                         <a:srgbClr val="E2E8F0"/>
@@ -3536,11 +3863,6 @@
                     </a:solidFill>
                   </a:tcPr>
                 </a:tc>
-                <a:extLst>
-                  <a:ext uri="{0D108BD9-81ED-4DB2-BD59-A6C34878D82A}">
-                    <a16:rowId xmlns:a16="http://schemas.microsoft.com/office/drawing/2014/main" val="10005"/>
-                  </a:ext>
-                </a:extLst>
               </a:tr>
               <a:tr h="411480">
                 <a:tc>
@@ -3548,7 +3870,7 @@
                     <a:bodyPr/>
                     <a:lstStyle/>
                     <a:p>
-                      <a:pPr marL="0" indent="0" algn="ctr">
+                      <a:pPr algn="ctr" indent="0" marL="0">
                         <a:buNone/>
                       </a:pPr>
                       <a:r>
@@ -3562,7 +3884,7 @@
                       <a:endParaRPr lang="en-US" sz="1400" dirty="0"/>
                     </a:p>
                   </a:txBody>
-                  <a:tcPr anchor="ctr">
+                  <a:tcPr marL="91440" marR="91440" marT="45720" marB="45720" anchor="ctr">
                     <a:lnL w="6350" cap="flat" cmpd="sng" algn="ctr">
                       <a:solidFill>
                         <a:srgbClr val="E2E8F0"/>
@@ -3609,7 +3931,7 @@
                     <a:bodyPr/>
                     <a:lstStyle/>
                     <a:p>
-                      <a:pPr marL="0" indent="0" algn="ctr">
+                      <a:pPr algn="ctr" indent="0" marL="0">
                         <a:buNone/>
                       </a:pPr>
                       <a:r>
@@ -3623,7 +3945,7 @@
                       <a:endParaRPr lang="en-US" sz="1400" dirty="0"/>
                     </a:p>
                   </a:txBody>
-                  <a:tcPr anchor="ctr">
+                  <a:tcPr marL="91440" marR="91440" marT="45720" marB="45720" anchor="ctr">
                     <a:lnL w="6350" cap="flat" cmpd="sng" algn="ctr">
                       <a:solidFill>
                         <a:srgbClr val="E2E8F0"/>
@@ -3665,11 +3987,6 @@
                     </a:solidFill>
                   </a:tcPr>
                 </a:tc>
-                <a:extLst>
-                  <a:ext uri="{0D108BD9-81ED-4DB2-BD59-A6C34878D82A}">
-                    <a16:rowId xmlns:a16="http://schemas.microsoft.com/office/drawing/2014/main" val="10006"/>
-                  </a:ext>
-                </a:extLst>
               </a:tr>
               <a:tr h="411480">
                 <a:tc>
@@ -3677,7 +3994,7 @@
                     <a:bodyPr/>
                     <a:lstStyle/>
                     <a:p>
-                      <a:pPr marL="0" indent="0" algn="ctr">
+                      <a:pPr algn="ctr" indent="0" marL="0">
                         <a:buNone/>
                       </a:pPr>
                       <a:r>
@@ -3691,7 +4008,7 @@
                       <a:endParaRPr lang="en-US" sz="1400" dirty="0"/>
                     </a:p>
                   </a:txBody>
-                  <a:tcPr anchor="ctr">
+                  <a:tcPr marL="91440" marR="91440" marT="45720" marB="45720" anchor="ctr">
                     <a:lnL w="6350" cap="flat" cmpd="sng" algn="ctr">
                       <a:solidFill>
                         <a:srgbClr val="E2E8F0"/>
@@ -3738,7 +4055,7 @@
                     <a:bodyPr/>
                     <a:lstStyle/>
                     <a:p>
-                      <a:pPr marL="0" indent="0" algn="ctr">
+                      <a:pPr algn="ctr" indent="0" marL="0">
                         <a:buNone/>
                       </a:pPr>
                       <a:r>
@@ -3752,7 +4069,7 @@
                       <a:endParaRPr lang="en-US" sz="1400" dirty="0"/>
                     </a:p>
                   </a:txBody>
-                  <a:tcPr anchor="ctr">
+                  <a:tcPr marL="91440" marR="91440" marT="45720" marB="45720" anchor="ctr">
                     <a:lnL w="6350" cap="flat" cmpd="sng" algn="ctr">
                       <a:solidFill>
                         <a:srgbClr val="E2E8F0"/>
@@ -3794,11 +4111,6 @@
                     </a:solidFill>
                   </a:tcPr>
                 </a:tc>
-                <a:extLst>
-                  <a:ext uri="{0D108BD9-81ED-4DB2-BD59-A6C34878D82A}">
-                    <a16:rowId xmlns:a16="http://schemas.microsoft.com/office/drawing/2014/main" val="10007"/>
-                  </a:ext>
-                </a:extLst>
               </a:tr>
             </a:tbl>
           </a:graphicData>
@@ -3825,7 +4137,7 @@
           <a:bodyPr wrap="square" rtlCol="0" anchor="ctr"/>
           <a:lstStyle/>
           <a:p>
-            <a:pPr marL="0" indent="0" algn="ctr">
+            <a:pPr algn="ctr" indent="0" marL="0">
               <a:buNone/>
             </a:pPr>
             <a:r>
@@ -3856,7 +4168,6 @@
         <a:solidFill>
           <a:srgbClr val="F8FAFC"/>
         </a:solidFill>
-        <a:effectLst/>
       </p:bgPr>
     </p:bg>
     <p:spTree>
@@ -3894,7 +4205,7 @@
           <a:bodyPr wrap="square" rtlCol="0" anchor="ctr"/>
           <a:lstStyle/>
           <a:p>
-            <a:pPr marL="0" indent="0">
+            <a:pPr indent="0" marL="0">
               <a:buNone/>
             </a:pPr>
             <a:r>
@@ -3921,7 +4232,9 @@
             <a:ext cx="7315200" cy="3657600"/>
           </a:xfrm>
           <a:prstGeom prst="rect">
-            <a:avLst/>
+            <a:avLst>
+              <a:gd name="adj" fmla="val 150000"/>
+            </a:avLst>
           </a:prstGeom>
           <a:solidFill>
             <a:srgbClr val="E2E8F0"/>
@@ -3955,7 +4268,7 @@
           <a:bodyPr wrap="square" rtlCol="0" anchor="ctr"/>
           <a:lstStyle/>
           <a:p>
-            <a:pPr marL="0" indent="0" algn="ctr">
+            <a:pPr algn="ctr" indent="0" marL="0">
               <a:buNone/>
             </a:pPr>
             <a:r>
@@ -3991,7 +4304,7 @@
           <a:bodyPr wrap="square" rtlCol="0" anchor="ctr"/>
           <a:lstStyle/>
           <a:p>
-            <a:pPr marL="0" indent="0" algn="ctr">
+            <a:pPr algn="ctr" indent="0" marL="0">
               <a:buNone/>
             </a:pPr>
             <a:r>
@@ -4027,7 +4340,7 @@
           <a:bodyPr wrap="square" rtlCol="0" anchor="ctr"/>
           <a:lstStyle/>
           <a:p>
-            <a:pPr marL="0" indent="0">
+            <a:pPr indent="0" marL="0">
               <a:buNone/>
             </a:pPr>
             <a:r>
@@ -4058,7 +4371,6 @@
         <a:solidFill>
           <a:srgbClr val="F8FAFC"/>
         </a:solidFill>
-        <a:effectLst/>
       </p:bgPr>
     </p:bg>
     <p:spTree>
@@ -4096,7 +4408,7 @@
           <a:bodyPr wrap="square" rtlCol="0" anchor="ctr"/>
           <a:lstStyle/>
           <a:p>
-            <a:pPr marL="0" indent="0">
+            <a:pPr indent="0" marL="0">
               <a:buNone/>
             </a:pPr>
             <a:r>
@@ -4119,8 +4431,8 @@
         </p:nvSpPr>
         <p:spPr>
           <a:xfrm>
-            <a:off x="457200" y="1188720"/>
-            <a:ext cx="7955280" cy="3680460"/>
+            <a:off x="731520" y="1188720"/>
+            <a:ext cx="7680960" cy="4114800"/>
           </a:xfrm>
           <a:prstGeom prst="roundRect">
             <a:avLst>
@@ -4146,8 +4458,8 @@
         </p:nvSpPr>
         <p:spPr>
           <a:xfrm>
-            <a:off x="2004645" y="1306185"/>
-            <a:ext cx="5880295" cy="339735"/>
+            <a:off x="1097280" y="1371600"/>
+            <a:ext cx="6858000" cy="548640"/>
           </a:xfrm>
           <a:prstGeom prst="rect">
             <a:avLst/>
@@ -4159,7 +4471,7 @@
           <a:bodyPr wrap="square" rtlCol="0" anchor="ctr"/>
           <a:lstStyle/>
           <a:p>
-            <a:pPr marL="0" indent="0">
+            <a:pPr indent="0" marL="0">
               <a:buNone/>
             </a:pPr>
             <a:r>
@@ -4182,8 +4494,8 @@
         </p:nvSpPr>
         <p:spPr>
           <a:xfrm>
-            <a:off x="2229729" y="1898904"/>
-            <a:ext cx="5092505" cy="2044700"/>
+            <a:off x="1097280" y="2103120"/>
+            <a:ext cx="6858000" cy="2743200"/>
           </a:xfrm>
           <a:prstGeom prst="rect">
             <a:avLst/>
@@ -4195,7 +4507,7 @@
           <a:bodyPr wrap="square" rtlCol="0" anchor="ctr"/>
           <a:lstStyle/>
           <a:p>
-            <a:pPr marL="0" indent="0">
+            <a:pPr indent="0" marL="0">
               <a:lnSpc>
                 <a:spcPts val="2600"/>
               </a:lnSpc>
@@ -4209,6 +4521,12 @@
               </a:rPr>
               <a:t>1. </a:t>
             </a:r>
+            <a:pPr indent="0" marL="0">
+              <a:lnSpc>
+                <a:spcPts val="2600"/>
+              </a:lnSpc>
+              <a:buNone/>
+            </a:pPr>
             <a:r>
               <a:rPr lang="en-US" sz="1600" dirty="0">
                 <a:solidFill>
@@ -4218,6 +4536,12 @@
               <a:t>Crean tareas para cada entregable del proyecto
 </a:t>
             </a:r>
+            <a:pPr indent="0" marL="0">
+              <a:lnSpc>
+                <a:spcPts val="2600"/>
+              </a:lnSpc>
+              <a:buNone/>
+            </a:pPr>
             <a:r>
               <a:rPr lang="en-US" sz="1600" b="1" dirty="0">
                 <a:solidFill>
@@ -4226,6 +4550,12 @@
               </a:rPr>
               <a:t>2. </a:t>
             </a:r>
+            <a:pPr indent="0" marL="0">
+              <a:lnSpc>
+                <a:spcPts val="2600"/>
+              </a:lnSpc>
+              <a:buNone/>
+            </a:pPr>
             <a:r>
               <a:rPr lang="en-US" sz="1600" dirty="0">
                 <a:solidFill>
@@ -4235,6 +4565,12 @@
               <a:t>Cada estudiante ve sus propias tareas asignadas
 </a:t>
             </a:r>
+            <a:pPr indent="0" marL="0">
+              <a:lnSpc>
+                <a:spcPts val="2600"/>
+              </a:lnSpc>
+              <a:buNone/>
+            </a:pPr>
             <a:r>
               <a:rPr lang="en-US" sz="1600" b="1" dirty="0">
                 <a:solidFill>
@@ -4243,6 +4579,12 @@
               </a:rPr>
               <a:t>3. </a:t>
             </a:r>
+            <a:pPr indent="0" marL="0">
+              <a:lnSpc>
+                <a:spcPts val="2600"/>
+              </a:lnSpc>
+              <a:buNone/>
+            </a:pPr>
             <a:r>
               <a:rPr lang="en-US" sz="1600" dirty="0">
                 <a:solidFill>
@@ -4252,6 +4594,12 @@
               <a:t>Mueven tareas a "Terminado" al completar cada sección
 </a:t>
             </a:r>
+            <a:pPr indent="0" marL="0">
+              <a:lnSpc>
+                <a:spcPts val="2600"/>
+              </a:lnSpc>
+              <a:buNone/>
+            </a:pPr>
             <a:r>
               <a:rPr lang="en-US" sz="1600" b="1" dirty="0">
                 <a:solidFill>
@@ -4260,6 +4608,12 @@
               </a:rPr>
               <a:t>4. </a:t>
             </a:r>
+            <a:pPr indent="0" marL="0">
+              <a:lnSpc>
+                <a:spcPts val="2600"/>
+              </a:lnSpc>
+              <a:buNone/>
+            </a:pPr>
             <a:r>
               <a:rPr lang="en-US" sz="1600" dirty="0">
                 <a:solidFill>
@@ -4280,8 +4634,8 @@
         </p:nvSpPr>
         <p:spPr>
           <a:xfrm>
-            <a:off x="1765495" y="4196588"/>
-            <a:ext cx="5198012" cy="490728"/>
+            <a:off x="2286000" y="4572000"/>
+            <a:ext cx="4572000" cy="548640"/>
           </a:xfrm>
           <a:prstGeom prst="roundRect">
             <a:avLst>
@@ -4307,8 +4661,8 @@
         </p:nvSpPr>
         <p:spPr>
           <a:xfrm>
-            <a:off x="1818248" y="4217924"/>
-            <a:ext cx="5092505" cy="490728"/>
+            <a:off x="2286000" y="4572000"/>
+            <a:ext cx="4572000" cy="548640"/>
           </a:xfrm>
           <a:prstGeom prst="rect">
             <a:avLst/>
@@ -4320,7 +4674,7 @@
           <a:bodyPr wrap="square" rtlCol="0" anchor="ctr"/>
           <a:lstStyle/>
           <a:p>
-            <a:pPr marL="0" indent="0" algn="ctr">
+            <a:pPr algn="ctr" indent="0" marL="0">
               <a:buNone/>
             </a:pPr>
             <a:r>
@@ -4351,7 +4705,6 @@
         <a:solidFill>
           <a:srgbClr val="F8FAFC"/>
         </a:solidFill>
-        <a:effectLst/>
       </p:bgPr>
     </p:bg>
     <p:spTree>
@@ -4389,7 +4742,7 @@
           <a:bodyPr wrap="square" rtlCol="0" anchor="ctr"/>
           <a:lstStyle/>
           <a:p>
-            <a:pPr marL="0" indent="0">
+            <a:pPr indent="0" marL="0">
               <a:buNone/>
             </a:pPr>
             <a:r>
@@ -4430,7 +4783,7 @@
             <a:prstDash val="solid"/>
           </a:ln>
           <a:effectLst>
-            <a:outerShdw blurRad="50800" dist="12700" dir="16200000" algn="bl" rotWithShape="0">
+            <a:outerShdw sx="100000" sy="100000" kx="0" ky="0" algn="bl" rotWithShape="0" blurRad="50800" dist="12700" dir="16200000">
               <a:srgbClr val="000000">
                 <a:alpha val="8000"/>
               </a:srgbClr>
@@ -4459,7 +4812,7 @@
           <a:bodyPr wrap="square" rtlCol="0" anchor="ctr"/>
           <a:lstStyle/>
           <a:p>
-            <a:pPr marL="0" indent="0">
+            <a:pPr indent="0" marL="0">
               <a:buNone/>
             </a:pPr>
             <a:r>
@@ -4470,10 +4823,13 @@
               </a:rPr>
               <a:t>❓ ¿Necesito instalar algo?</a:t>
             </a:r>
+            <a:pPr indent="0" marL="0">
+              <a:buNone/>
+            </a:pPr>
             <a:endParaRPr lang="en-US" sz="1300" dirty="0"/>
           </a:p>
           <a:p>
-            <a:pPr marL="0" indent="0">
+            <a:pPr indent="0" marL="0">
               <a:buNone/>
             </a:pPr>
             <a:r>
@@ -4514,7 +4870,7 @@
             <a:prstDash val="solid"/>
           </a:ln>
           <a:effectLst>
-            <a:outerShdw blurRad="50800" dist="12700" dir="16200000" algn="bl" rotWithShape="0">
+            <a:outerShdw sx="100000" sy="100000" kx="0" ky="0" algn="bl" rotWithShape="0" blurRad="50800" dist="12700" dir="16200000">
               <a:srgbClr val="000000">
                 <a:alpha val="8000"/>
               </a:srgbClr>
@@ -4543,7 +4899,7 @@
           <a:bodyPr wrap="square" rtlCol="0" anchor="ctr"/>
           <a:lstStyle/>
           <a:p>
-            <a:pPr marL="0" indent="0">
+            <a:pPr indent="0" marL="0">
               <a:buNone/>
             </a:pPr>
             <a:r>
@@ -4554,10 +4910,13 @@
               </a:rPr>
               <a:t>❓ ¿Puedo usarlo en mi teléfono?</a:t>
             </a:r>
+            <a:pPr indent="0" marL="0">
+              <a:buNone/>
+            </a:pPr>
             <a:endParaRPr lang="en-US" sz="1300" dirty="0"/>
           </a:p>
           <a:p>
-            <a:pPr marL="0" indent="0">
+            <a:pPr indent="0" marL="0">
               <a:buNone/>
             </a:pPr>
             <a:r>
@@ -4598,7 +4957,7 @@
             <a:prstDash val="solid"/>
           </a:ln>
           <a:effectLst>
-            <a:outerShdw blurRad="50800" dist="12700" dir="16200000" algn="bl" rotWithShape="0">
+            <a:outerShdw sx="100000" sy="100000" kx="0" ky="0" algn="bl" rotWithShape="0" blurRad="50800" dist="12700" dir="16200000">
               <a:srgbClr val="000000">
                 <a:alpha val="8000"/>
               </a:srgbClr>
@@ -4627,7 +4986,7 @@
           <a:bodyPr wrap="square" rtlCol="0" anchor="ctr"/>
           <a:lstStyle/>
           <a:p>
-            <a:pPr marL="0" indent="0">
+            <a:pPr indent="0" marL="0">
               <a:buNone/>
             </a:pPr>
             <a:r>
@@ -4638,10 +4997,13 @@
               </a:rPr>
               <a:t>❓ ¿Mis datos están seguros?</a:t>
             </a:r>
+            <a:pPr indent="0" marL="0">
+              <a:buNone/>
+            </a:pPr>
             <a:endParaRPr lang="en-US" sz="1300" dirty="0"/>
           </a:p>
           <a:p>
-            <a:pPr marL="0" indent="0">
+            <a:pPr indent="0" marL="0">
               <a:buNone/>
             </a:pPr>
             <a:r>
@@ -4682,7 +5044,7 @@
             <a:prstDash val="solid"/>
           </a:ln>
           <a:effectLst>
-            <a:outerShdw blurRad="50800" dist="12700" dir="16200000" algn="bl" rotWithShape="0">
+            <a:outerShdw sx="100000" sy="100000" kx="0" ky="0" algn="bl" rotWithShape="0" blurRad="50800" dist="12700" dir="16200000">
               <a:srgbClr val="000000">
                 <a:alpha val="8000"/>
               </a:srgbClr>
@@ -4711,7 +5073,7 @@
           <a:bodyPr wrap="square" rtlCol="0" anchor="ctr"/>
           <a:lstStyle/>
           <a:p>
-            <a:pPr marL="0" indent="0">
+            <a:pPr indent="0" marL="0">
               <a:buNone/>
             </a:pPr>
             <a:r>
@@ -4722,10 +5084,13 @@
               </a:rPr>
               <a:t>❓ ¿Puedo compartir tareas?</a:t>
             </a:r>
+            <a:pPr indent="0" marL="0">
+              <a:buNone/>
+            </a:pPr>
             <a:endParaRPr lang="en-US" sz="1300" dirty="0"/>
           </a:p>
           <a:p>
-            <a:pPr marL="0" indent="0">
+            <a:pPr indent="0" marL="0">
               <a:buNone/>
             </a:pPr>
             <a:r>
@@ -4766,7 +5131,7 @@
             <a:prstDash val="solid"/>
           </a:ln>
           <a:effectLst>
-            <a:outerShdw blurRad="50800" dist="12700" dir="16200000" algn="bl" rotWithShape="0">
+            <a:outerShdw sx="100000" sy="100000" kx="0" ky="0" algn="bl" rotWithShape="0" blurRad="50800" dist="12700" dir="16200000">
               <a:srgbClr val="000000">
                 <a:alpha val="8000"/>
               </a:srgbClr>
@@ -4795,7 +5160,7 @@
           <a:bodyPr wrap="square" rtlCol="0" anchor="ctr"/>
           <a:lstStyle/>
           <a:p>
-            <a:pPr marL="0" indent="0">
+            <a:pPr indent="0" marL="0">
               <a:buNone/>
             </a:pPr>
             <a:r>
@@ -4806,10 +5171,13 @@
               </a:rPr>
               <a:t>❓ ¿Y si olvido mi contraseña?</a:t>
             </a:r>
+            <a:pPr indent="0" marL="0">
+              <a:buNone/>
+            </a:pPr>
             <a:endParaRPr lang="en-US" sz="1300" dirty="0"/>
           </a:p>
           <a:p>
-            <a:pPr marL="0" indent="0">
+            <a:pPr indent="0" marL="0">
               <a:buNone/>
             </a:pPr>
             <a:r>
@@ -4840,7 +5208,6 @@
         <a:solidFill>
           <a:srgbClr val="F8FAFC"/>
         </a:solidFill>
-        <a:effectLst/>
       </p:bgPr>
     </p:bg>
     <p:spTree>
@@ -4878,7 +5245,7 @@
           <a:bodyPr wrap="square" rtlCol="0" anchor="ctr"/>
           <a:lstStyle/>
           <a:p>
-            <a:pPr marL="0" indent="0" algn="ctr">
+            <a:pPr algn="ctr" indent="0" marL="0">
               <a:buNone/>
             </a:pPr>
             <a:r>
@@ -4914,7 +5281,7 @@
           <a:bodyPr wrap="square" rtlCol="0" anchor="ctr"/>
           <a:lstStyle/>
           <a:p>
-            <a:pPr marL="0" indent="0" algn="ctr">
+            <a:pPr algn="ctr" indent="0" marL="0">
               <a:buNone/>
             </a:pPr>
             <a:r>
@@ -4970,7 +5337,7 @@
           <a:bodyPr wrap="square" rtlCol="0" anchor="ctr"/>
           <a:lstStyle/>
           <a:p>
-            <a:pPr marL="0" indent="0" algn="ctr">
+            <a:pPr algn="ctr" indent="0" marL="0">
               <a:buNone/>
             </a:pPr>
             <a:r>
@@ -5006,7 +5373,7 @@
           <a:bodyPr wrap="square" rtlCol="0" anchor="ctr"/>
           <a:lstStyle/>
           <a:p>
-            <a:pPr marL="0" indent="0" algn="ctr">
+            <a:pPr algn="ctr" indent="0" marL="0">
               <a:buNone/>
             </a:pPr>
             <a:r>
@@ -5015,7 +5382,7 @@
                   <a:srgbClr val="3B82F6"/>
                 </a:solidFill>
               </a:rPr>
-              <a:t>Repositorio: https://github.com/tu-usuario/taskflow-kanban</a:t>
+              <a:t>Repositorio: https://github.com/jjtddiaz-a11y/taskflow-kanban</a:t>
             </a:r>
             <a:endParaRPr lang="en-US" sz="1400" dirty="0"/>
           </a:p>
@@ -5322,319 +5689,4 @@
     </a:ext>
   </a:extLst>
 </a:theme>
-</file>
-
-<file path=ppt/theme/theme2.xml><?xml version="1.0" encoding="utf-8"?>
-<a:theme xmlns:a="http://schemas.openxmlformats.org/drawingml/2006/main" name="Tema de Office">
-  <a:themeElements>
-    <a:clrScheme name="Office">
-      <a:dk1>
-        <a:sysClr val="windowText" lastClr="000000"/>
-      </a:dk1>
-      <a:lt1>
-        <a:sysClr val="window" lastClr="FFFFFF"/>
-      </a:lt1>
-      <a:dk2>
-        <a:srgbClr val="0E2841"/>
-      </a:dk2>
-      <a:lt2>
-        <a:srgbClr val="E8E8E8"/>
-      </a:lt2>
-      <a:accent1>
-        <a:srgbClr val="156082"/>
-      </a:accent1>
-      <a:accent2>
-        <a:srgbClr val="E97132"/>
-      </a:accent2>
-      <a:accent3>
-        <a:srgbClr val="196B24"/>
-      </a:accent3>
-      <a:accent4>
-        <a:srgbClr val="0F9ED5"/>
-      </a:accent4>
-      <a:accent5>
-        <a:srgbClr val="A02B93"/>
-      </a:accent5>
-      <a:accent6>
-        <a:srgbClr val="4EA72E"/>
-      </a:accent6>
-      <a:hlink>
-        <a:srgbClr val="467886"/>
-      </a:hlink>
-      <a:folHlink>
-        <a:srgbClr val="96607D"/>
-      </a:folHlink>
-    </a:clrScheme>
-    <a:fontScheme name="Office">
-      <a:majorFont>
-        <a:latin typeface="Aptos Display" panose="02110004020202020204"/>
-        <a:ea typeface=""/>
-        <a:cs typeface=""/>
-        <a:font script="Jpan" typeface="游ゴシック Light"/>
-        <a:font script="Hang" typeface="맑은 고딕"/>
-        <a:font script="Hans" typeface="等线 Light"/>
-        <a:font script="Hant" typeface="新細明體"/>
-        <a:font script="Arab" typeface="Times New Roman"/>
-        <a:font script="Hebr" typeface="Times New Roman"/>
-        <a:font script="Thai" typeface="Angsana New"/>
-        <a:font script="Ethi" typeface="Nyala"/>
-        <a:font script="Beng" typeface="Vrinda"/>
-        <a:font script="Gujr" typeface="Shruti"/>
-        <a:font script="Khmr" typeface="MoolBoran"/>
-        <a:font script="Knda" typeface="Tunga"/>
-        <a:font script="Guru" typeface="Raavi"/>
-        <a:font script="Cans" typeface="Euphemia"/>
-        <a:font script="Cher" typeface="Plantagenet Cherokee"/>
-        <a:font script="Yiii" typeface="Microsoft Yi Baiti"/>
-        <a:font script="Tibt" typeface="Microsoft Himalaya"/>
-        <a:font script="Thaa" typeface="MV Boli"/>
-        <a:font script="Deva" typeface="Mangal"/>
-        <a:font script="Telu" typeface="Gautami"/>
-        <a:font script="Taml" typeface="Latha"/>
-        <a:font script="Syrc" typeface="Estrangelo Edessa"/>
-        <a:font script="Orya" typeface="Kalinga"/>
-        <a:font script="Mlym" typeface="Kartika"/>
-        <a:font script="Laoo" typeface="DokChampa"/>
-        <a:font script="Sinh" typeface="Iskoola Pota"/>
-        <a:font script="Mong" typeface="Mongolian Baiti"/>
-        <a:font script="Viet" typeface="Times New Roman"/>
-        <a:font script="Uigh" typeface="Microsoft Uighur"/>
-        <a:font script="Geor" typeface="Sylfaen"/>
-        <a:font script="Armn" typeface="Arial"/>
-        <a:font script="Bugi" typeface="Leelawadee UI"/>
-        <a:font script="Bopo" typeface="Microsoft JhengHei"/>
-        <a:font script="Java" typeface="Javanese Text"/>
-        <a:font script="Lisu" typeface="Segoe UI"/>
-        <a:font script="Mymr" typeface="Myanmar Text"/>
-        <a:font script="Nkoo" typeface="Ebrima"/>
-        <a:font script="Olck" typeface="Nirmala UI"/>
-        <a:font script="Osma" typeface="Ebrima"/>
-        <a:font script="Phag" typeface="Phagspa"/>
-        <a:font script="Syrn" typeface="Estrangelo Edessa"/>
-        <a:font script="Syrj" typeface="Estrangelo Edessa"/>
-        <a:font script="Syre" typeface="Estrangelo Edessa"/>
-        <a:font script="Sora" typeface="Nirmala UI"/>
-        <a:font script="Tale" typeface="Microsoft Tai Le"/>
-        <a:font script="Talu" typeface="Microsoft New Tai Lue"/>
-        <a:font script="Tfng" typeface="Ebrima"/>
-      </a:majorFont>
-      <a:minorFont>
-        <a:latin typeface="Aptos" panose="02110004020202020204"/>
-        <a:ea typeface=""/>
-        <a:cs typeface=""/>
-        <a:font script="Jpan" typeface="游ゴシック"/>
-        <a:font script="Hang" typeface="맑은 고딕"/>
-        <a:font script="Hans" typeface="等线"/>
-        <a:font script="Hant" typeface="新細明體"/>
-        <a:font script="Arab" typeface="Arial"/>
-        <a:font script="Hebr" typeface="Arial"/>
-        <a:font script="Thai" typeface="Cordia New"/>
-        <a:font script="Ethi" typeface="Nyala"/>
-        <a:font script="Beng" typeface="Vrinda"/>
-        <a:font script="Gujr" typeface="Shruti"/>
-        <a:font script="Khmr" typeface="DaunPenh"/>
-        <a:font script="Knda" typeface="Tunga"/>
-        <a:font script="Guru" typeface="Raavi"/>
-        <a:font script="Cans" typeface="Euphemia"/>
-        <a:font script="Cher" typeface="Plantagenet Cherokee"/>
-        <a:font script="Yiii" typeface="Microsoft Yi Baiti"/>
-        <a:font script="Tibt" typeface="Microsoft Himalaya"/>
-        <a:font script="Thaa" typeface="MV Boli"/>
-        <a:font script="Deva" typeface="Mangal"/>
-        <a:font script="Telu" typeface="Gautami"/>
-        <a:font script="Taml" typeface="Latha"/>
-        <a:font script="Syrc" typeface="Estrangelo Edessa"/>
-        <a:font script="Orya" typeface="Kalinga"/>
-        <a:font script="Mlym" typeface="Kartika"/>
-        <a:font script="Laoo" typeface="DokChampa"/>
-        <a:font script="Sinh" typeface="Iskoola Pota"/>
-        <a:font script="Mong" typeface="Mongolian Baiti"/>
-        <a:font script="Viet" typeface="Arial"/>
-        <a:font script="Uigh" typeface="Microsoft Uighur"/>
-        <a:font script="Geor" typeface="Sylfaen"/>
-        <a:font script="Armn" typeface="Arial"/>
-        <a:font script="Bugi" typeface="Leelawadee UI"/>
-        <a:font script="Bopo" typeface="Microsoft JhengHei"/>
-        <a:font script="Java" typeface="Javanese Text"/>
-        <a:font script="Lisu" typeface="Segoe UI"/>
-        <a:font script="Mymr" typeface="Myanmar Text"/>
-        <a:font script="Nkoo" typeface="Ebrima"/>
-        <a:font script="Olck" typeface="Nirmala UI"/>
-        <a:font script="Osma" typeface="Ebrima"/>
-        <a:font script="Phag" typeface="Phagspa"/>
-        <a:font script="Syrn" typeface="Estrangelo Edessa"/>
-        <a:font script="Syrj" typeface="Estrangelo Edessa"/>
-        <a:font script="Syre" typeface="Estrangelo Edessa"/>
-        <a:font script="Sora" typeface="Nirmala UI"/>
-        <a:font script="Tale" typeface="Microsoft Tai Le"/>
-        <a:font script="Talu" typeface="Microsoft New Tai Lue"/>
-        <a:font script="Tfng" typeface="Ebrima"/>
-      </a:minorFont>
-    </a:fontScheme>
-    <a:fmtScheme name="Office">
-      <a:fillStyleLst>
-        <a:solidFill>
-          <a:schemeClr val="phClr"/>
-        </a:solidFill>
-        <a:gradFill rotWithShape="1">
-          <a:gsLst>
-            <a:gs pos="0">
-              <a:schemeClr val="phClr">
-                <a:lumMod val="110000"/>
-                <a:satMod val="105000"/>
-                <a:tint val="67000"/>
-              </a:schemeClr>
-            </a:gs>
-            <a:gs pos="50000">
-              <a:schemeClr val="phClr">
-                <a:lumMod val="105000"/>
-                <a:satMod val="103000"/>
-                <a:tint val="73000"/>
-              </a:schemeClr>
-            </a:gs>
-            <a:gs pos="100000">
-              <a:schemeClr val="phClr">
-                <a:lumMod val="105000"/>
-                <a:satMod val="109000"/>
-                <a:tint val="81000"/>
-              </a:schemeClr>
-            </a:gs>
-          </a:gsLst>
-          <a:lin ang="5400000" scaled="0"/>
-        </a:gradFill>
-        <a:gradFill rotWithShape="1">
-          <a:gsLst>
-            <a:gs pos="0">
-              <a:schemeClr val="phClr">
-                <a:satMod val="103000"/>
-                <a:lumMod val="102000"/>
-                <a:tint val="94000"/>
-              </a:schemeClr>
-            </a:gs>
-            <a:gs pos="50000">
-              <a:schemeClr val="phClr">
-                <a:satMod val="110000"/>
-                <a:lumMod val="100000"/>
-                <a:shade val="100000"/>
-              </a:schemeClr>
-            </a:gs>
-            <a:gs pos="100000">
-              <a:schemeClr val="phClr">
-                <a:lumMod val="99000"/>
-                <a:satMod val="120000"/>
-                <a:shade val="78000"/>
-              </a:schemeClr>
-            </a:gs>
-          </a:gsLst>
-          <a:lin ang="5400000" scaled="0"/>
-        </a:gradFill>
-      </a:fillStyleLst>
-      <a:lnStyleLst>
-        <a:ln w="12700" cap="flat" cmpd="sng" algn="ctr">
-          <a:solidFill>
-            <a:schemeClr val="phClr"/>
-          </a:solidFill>
-          <a:prstDash val="solid"/>
-          <a:miter lim="800000"/>
-        </a:ln>
-        <a:ln w="19050" cap="flat" cmpd="sng" algn="ctr">
-          <a:solidFill>
-            <a:schemeClr val="phClr"/>
-          </a:solidFill>
-          <a:prstDash val="solid"/>
-          <a:miter lim="800000"/>
-        </a:ln>
-        <a:ln w="25400" cap="flat" cmpd="sng" algn="ctr">
-          <a:solidFill>
-            <a:schemeClr val="phClr"/>
-          </a:solidFill>
-          <a:prstDash val="solid"/>
-          <a:miter lim="800000"/>
-        </a:ln>
-      </a:lnStyleLst>
-      <a:effectStyleLst>
-        <a:effectStyle>
-          <a:effectLst/>
-        </a:effectStyle>
-        <a:effectStyle>
-          <a:effectLst/>
-        </a:effectStyle>
-        <a:effectStyle>
-          <a:effectLst>
-            <a:outerShdw blurRad="57150" dist="19050" dir="5400000" algn="ctr" rotWithShape="0">
-              <a:srgbClr val="000000">
-                <a:alpha val="63000"/>
-              </a:srgbClr>
-            </a:outerShdw>
-          </a:effectLst>
-        </a:effectStyle>
-      </a:effectStyleLst>
-      <a:bgFillStyleLst>
-        <a:solidFill>
-          <a:schemeClr val="phClr"/>
-        </a:solidFill>
-        <a:solidFill>
-          <a:schemeClr val="phClr">
-            <a:tint val="95000"/>
-            <a:satMod val="170000"/>
-          </a:schemeClr>
-        </a:solidFill>
-        <a:gradFill rotWithShape="1">
-          <a:gsLst>
-            <a:gs pos="0">
-              <a:schemeClr val="phClr">
-                <a:tint val="93000"/>
-                <a:satMod val="150000"/>
-                <a:shade val="98000"/>
-                <a:lumMod val="102000"/>
-              </a:schemeClr>
-            </a:gs>
-            <a:gs pos="50000">
-              <a:schemeClr val="phClr">
-                <a:tint val="98000"/>
-                <a:satMod val="130000"/>
-                <a:shade val="90000"/>
-                <a:lumMod val="103000"/>
-              </a:schemeClr>
-            </a:gs>
-            <a:gs pos="100000">
-              <a:schemeClr val="phClr">
-                <a:shade val="63000"/>
-                <a:satMod val="120000"/>
-              </a:schemeClr>
-            </a:gs>
-          </a:gsLst>
-          <a:lin ang="5400000" scaled="0"/>
-        </a:gradFill>
-      </a:bgFillStyleLst>
-    </a:fmtScheme>
-  </a:themeElements>
-  <a:objectDefaults>
-    <a:lnDef>
-      <a:spPr/>
-      <a:bodyPr/>
-      <a:lstStyle/>
-      <a:style>
-        <a:lnRef idx="2">
-          <a:schemeClr val="accent1"/>
-        </a:lnRef>
-        <a:fillRef idx="0">
-          <a:schemeClr val="accent1"/>
-        </a:fillRef>
-        <a:effectRef idx="1">
-          <a:schemeClr val="accent1"/>
-        </a:effectRef>
-        <a:fontRef idx="minor">
-          <a:schemeClr val="tx1"/>
-        </a:fontRef>
-      </a:style>
-    </a:lnDef>
-  </a:objectDefaults>
-  <a:extraClrSchemeLst/>
-  <a:extLst>
-    <a:ext uri="{05A4C25C-085E-4340-85A3-A5531E510DB2}">
-      <thm15:themeFamily xmlns:thm15="http://schemas.microsoft.com/office/thememl/2012/main" name="Office Theme" id="{2E142A2C-CD16-42D6-873A-C26D2A0506FA}" vid="{1BDDFF52-6CD6-40A5-AB3C-68EB2F1E4D0A}"/>
-    </a:ext>
-  </a:extLst>
-</a:theme>
 </file>